--- a/docs/reports/汇报_有界推进与绿灯底座_v4提案.pptx
+++ b/docs/reports/汇报_有界推进与绿灯底座_v4提案.pptx
@@ -3258,13 +3258,14 @@
               </a:spcAft>
             </a:pPr>
             <a:r>
-              <a:rPr sz="4000" b="1">
-                <a:solidFill>
-                  <a:srgbClr val="16324F"/>
-                </a:solidFill>
-                <a:latin typeface="Microsoft YaHei"/>
-              </a:rPr>
-              <a:t>有界推进与绿灯底座</a:t>
+              <a:rPr sz="3200" b="1">
+                <a:solidFill>
+                  <a:srgbClr val="143252"/>
+                </a:solidFill>
+                <a:latin typeface="Microsoft YaHei"/>
+                <a:ea typeface="Microsoft YaHei"/>
+              </a:rPr>
+              <a:t>怎样用对 AI——硬科技预研的工作方法</a:t>
             </a:r>
           </a:p>
         </p:txBody>
@@ -3300,13 +3301,14 @@
               </a:spcAft>
             </a:pPr>
             <a:r>
-              <a:rPr sz="1900" b="0">
-                <a:solidFill>
-                  <a:srgbClr val="22384C"/>
-                </a:solidFill>
-                <a:latin typeface="Microsoft YaHei"/>
-              </a:rPr>
-              <a:t>AI 辅助硬科技预研的工作方法</a:t>
+              <a:rPr sz="1800" b="0">
+                <a:solidFill>
+                  <a:srgbClr val="1E5A7A"/>
+                </a:solidFill>
+                <a:latin typeface="Microsoft YaHei"/>
+                <a:ea typeface="Microsoft YaHei"/>
+              </a:rPr>
+              <a:t>方法名：有界推进与绿灯底座</a:t>
             </a:r>
           </a:p>
         </p:txBody>
